--- a/templates/modern-yellow.pptx
+++ b/templates/modern-yellow.pptx
@@ -1610,7 +1610,7 @@
         </p:nvSpPr>
         <p:spPr>
           <a:xfrm>
-            <a:off x="0" y="1898247"/>
+            <a:off x="-1779706" y="1898247"/>
             <a:ext cx="2079706" cy="4140000"/>
           </a:xfrm>
           <a:custGeom>
@@ -1672,7 +1672,9 @@
             </a:pathLst>
           </a:custGeom>
           <a:solidFill>
-            <a:srgbClr val="FECE00"/>
+            <a:srgbClr val="FECE00">
+              <a:alpha val="24000"/>
+            </a:srgbClr>
           </a:solidFill>
           <a:ln w="57150">
             <a:noFill/>
@@ -1682,7 +1684,7 @@
               <a:schemeClr val="tx1">
                 <a:lumMod val="50000"/>
                 <a:lumOff val="50000"/>
-                <a:alpha val="26000"/>
+                <a:alpha val="8000"/>
               </a:schemeClr>
             </a:outerShdw>
           </a:effectLst>

--- a/templates/modern-yellow.pptx
+++ b/templates/modern-yellow.pptx
@@ -1085,7 +1085,7 @@
         </p:nvSpPr>
         <p:spPr>
           <a:xfrm>
-            <a:off x="0" y="0"/>
+            <a:off x="0" y="-1750154"/>
             <a:ext cx="12192000" cy="2110154"/>
           </a:xfrm>
           <a:custGeom>
@@ -1149,7 +1149,7 @@
               <a:schemeClr val="tx1">
                 <a:lumMod val="50000"/>
                 <a:lumOff val="50000"/>
-                <a:alpha val="26000"/>
+                <a:alpha val="8000"/>
               </a:schemeClr>
             </a:outerShdw>
           </a:effectLst>

--- a/templates/modern-yellow.pptx
+++ b/templates/modern-yellow.pptx
@@ -1507,8 +1507,8 @@
         </p:nvSpPr>
         <p:spPr>
           <a:xfrm>
-            <a:off x="1524000" y="2286000"/>
-            <a:ext cx="9144000" cy="1600200"/>
+            <a:off x="397665" y="2286000"/>
+            <a:ext cx="11396670" cy="1600200"/>
           </a:xfrm>
           <a:prstGeom prst="rect">
             <a:avLst/>
@@ -1542,8 +1542,8 @@
         </p:nvSpPr>
         <p:spPr>
           <a:xfrm>
-            <a:off x="1524000" y="4000500"/>
-            <a:ext cx="9144000" cy="800100"/>
+            <a:off x="397665" y="4000500"/>
+            <a:ext cx="11396670" cy="800100"/>
           </a:xfrm>
           <a:prstGeom prst="rect">
             <a:avLst/>
